--- a/docs/答辩PPT.pptx
+++ b/docs/答辩PPT.pptx
@@ -1,27 +1,27 @@
 
 <file path=ppt/presentation.xml><?xml version="1.0" encoding="utf-8"?>
-<p:presentation xmlns:a="http://schemas.openxmlformats.org/drawingml/2006/main" xmlns:r="http://schemas.openxmlformats.org/officeDocument/2006/relationships" xmlns:p="http://schemas.openxmlformats.org/presentationml/2006/main" saveSubsetFonts="1" autoCompressPictures="0">
+<p:presentation xmlns:a="http://schemas.openxmlformats.org/drawingml/2006/main" xmlns:r="http://schemas.openxmlformats.org/officeDocument/2006/relationships" xmlns:p="http://schemas.openxmlformats.org/presentationml/2006/main" autoCompressPictures="0">
   <p:sldMasterIdLst>
     <p:sldMasterId id="2147483648" r:id="rId1"/>
   </p:sldMasterIdLst>
   <p:sldIdLst>
-    <p:sldId id="256" r:id="rId7"/>
-    <p:sldId id="257" r:id="rId8"/>
-    <p:sldId id="258" r:id="rId9"/>
-    <p:sldId id="259" r:id="rId10"/>
-    <p:sldId id="260" r:id="rId11"/>
-    <p:sldId id="261" r:id="rId12"/>
-    <p:sldId id="262" r:id="rId13"/>
-    <p:sldId id="263" r:id="rId14"/>
-    <p:sldId id="264" r:id="rId15"/>
-    <p:sldId id="265" r:id="rId16"/>
-    <p:sldId id="266" r:id="rId17"/>
-    <p:sldId id="267" r:id="rId18"/>
-    <p:sldId id="268" r:id="rId19"/>
-    <p:sldId id="269" r:id="rId20"/>
-    <p:sldId id="270" r:id="rId21"/>
+    <p:sldId id="256" r:id="rId3"/>
+    <p:sldId id="257" r:id="rId4"/>
+    <p:sldId id="258" r:id="rId5"/>
+    <p:sldId id="259" r:id="rId6"/>
+    <p:sldId id="260" r:id="rId7"/>
+    <p:sldId id="261" r:id="rId8"/>
+    <p:sldId id="262" r:id="rId9"/>
+    <p:sldId id="263" r:id="rId10"/>
+    <p:sldId id="264" r:id="rId11"/>
+    <p:sldId id="265" r:id="rId12"/>
+    <p:sldId id="266" r:id="rId13"/>
+    <p:sldId id="267" r:id="rId14"/>
+    <p:sldId id="268" r:id="rId15"/>
+    <p:sldId id="269" r:id="rId16"/>
+    <p:sldId id="270" r:id="rId17"/>
   </p:sldIdLst>
-  <p:sldSz cx="12191695" cy="6858000" type="screen4x3"/>
+  <p:sldSz cx="12191365" cy="6858000" type="screen4x3"/>
   <p:notesSz cx="6858000" cy="9144000"/>
   <p:defaultTextStyle>
     <a:defPPr>
@@ -118,6 +118,22 @@
       </a:defRPr>
     </a:lvl9pPr>
   </p:defaultTextStyle>
+  <p:extLst>
+    <p:ext uri="{EFAFB233-063F-42B5-8137-9DF3F51BA10A}">
+      <p15:sldGuideLst xmlns:p15="http://schemas.microsoft.com/office/powerpoint/2012/main">
+        <p15:guide id="1" orient="horz" pos="2160" userDrawn="1">
+          <p15:clr>
+            <a:srgbClr val="A4A3A4"/>
+          </p15:clr>
+        </p15:guide>
+        <p15:guide id="2" pos="2880" userDrawn="1">
+          <p15:clr>
+            <a:srgbClr val="A4A3A4"/>
+          </p15:clr>
+        </p15:guide>
+      </p15:sldGuideLst>
+    </p:ext>
+  </p:extLst>
 </p:presentation>
 </file>
 
@@ -302,7 +318,6 @@
           <a:p>
             <a:fld id="{5BCAD085-E8A6-8845-BD4E-CB4CCA059FC4}" type="datetimeFigureOut">
               <a:rPr lang="en-US" smtClean="0"/>
-              <a:t>1/27/13</a:t>
             </a:fld>
             <a:endParaRPr lang="en-US"/>
           </a:p>
@@ -344,18 +359,12 @@
           <a:p>
             <a:fld id="{C1FF6DA9-008F-8B48-92A6-B652298478BF}" type="slidenum">
               <a:rPr lang="en-US" smtClean="0"/>
-              <a:t>‹#›</a:t>
             </a:fld>
             <a:endParaRPr lang="en-US"/>
           </a:p>
         </p:txBody>
       </p:sp>
     </p:spTree>
-    <p:extLst>
-      <p:ext uri="{BB962C8B-B14F-4D97-AF65-F5344CB8AC3E}">
-        <p14:creationId xmlns:p14="http://schemas.microsoft.com/office/powerpoint/2010/main" val="3168075583"/>
-      </p:ext>
-    </p:extLst>
   </p:cSld>
   <p:clrMapOvr>
     <a:masterClrMapping/>
@@ -423,6 +432,7 @@
               <a:rPr lang="en-US" smtClean="0"/>
               <a:t>Click to edit Master text styles</a:t>
             </a:r>
+            <a:endParaRPr lang="en-US" smtClean="0"/>
           </a:p>
           <a:p>
             <a:pPr lvl="1"/>
@@ -430,6 +440,7 @@
               <a:rPr lang="en-US" smtClean="0"/>
               <a:t>Second level</a:t>
             </a:r>
+            <a:endParaRPr lang="en-US" smtClean="0"/>
           </a:p>
           <a:p>
             <a:pPr lvl="2"/>
@@ -437,6 +448,7 @@
               <a:rPr lang="en-US" smtClean="0"/>
               <a:t>Third level</a:t>
             </a:r>
+            <a:endParaRPr lang="en-US" smtClean="0"/>
           </a:p>
           <a:p>
             <a:pPr lvl="3"/>
@@ -444,6 +456,7 @@
               <a:rPr lang="en-US" smtClean="0"/>
               <a:t>Fourth level</a:t>
             </a:r>
+            <a:endParaRPr lang="en-US" smtClean="0"/>
           </a:p>
           <a:p>
             <a:pPr lvl="4"/>
@@ -472,7 +485,6 @@
           <a:p>
             <a:fld id="{5BCAD085-E8A6-8845-BD4E-CB4CCA059FC4}" type="datetimeFigureOut">
               <a:rPr lang="en-US" smtClean="0"/>
-              <a:t>1/27/13</a:t>
             </a:fld>
             <a:endParaRPr lang="en-US"/>
           </a:p>
@@ -514,18 +526,12 @@
           <a:p>
             <a:fld id="{C1FF6DA9-008F-8B48-92A6-B652298478BF}" type="slidenum">
               <a:rPr lang="en-US" smtClean="0"/>
-              <a:t>‹#›</a:t>
             </a:fld>
             <a:endParaRPr lang="en-US"/>
           </a:p>
         </p:txBody>
       </p:sp>
     </p:spTree>
-    <p:extLst>
-      <p:ext uri="{BB962C8B-B14F-4D97-AF65-F5344CB8AC3E}">
-        <p14:creationId xmlns:p14="http://schemas.microsoft.com/office/powerpoint/2010/main" val="2910927964"/>
-      </p:ext>
-    </p:extLst>
   </p:cSld>
   <p:clrMapOvr>
     <a:masterClrMapping/>
@@ -603,6 +609,7 @@
               <a:rPr lang="en-US" smtClean="0"/>
               <a:t>Click to edit Master text styles</a:t>
             </a:r>
+            <a:endParaRPr lang="en-US" smtClean="0"/>
           </a:p>
           <a:p>
             <a:pPr lvl="1"/>
@@ -610,6 +617,7 @@
               <a:rPr lang="en-US" smtClean="0"/>
               <a:t>Second level</a:t>
             </a:r>
+            <a:endParaRPr lang="en-US" smtClean="0"/>
           </a:p>
           <a:p>
             <a:pPr lvl="2"/>
@@ -617,6 +625,7 @@
               <a:rPr lang="en-US" smtClean="0"/>
               <a:t>Third level</a:t>
             </a:r>
+            <a:endParaRPr lang="en-US" smtClean="0"/>
           </a:p>
           <a:p>
             <a:pPr lvl="3"/>
@@ -624,6 +633,7 @@
               <a:rPr lang="en-US" smtClean="0"/>
               <a:t>Fourth level</a:t>
             </a:r>
+            <a:endParaRPr lang="en-US" smtClean="0"/>
           </a:p>
           <a:p>
             <a:pPr lvl="4"/>
@@ -652,7 +662,6 @@
           <a:p>
             <a:fld id="{5BCAD085-E8A6-8845-BD4E-CB4CCA059FC4}" type="datetimeFigureOut">
               <a:rPr lang="en-US" smtClean="0"/>
-              <a:t>1/27/13</a:t>
             </a:fld>
             <a:endParaRPr lang="en-US"/>
           </a:p>
@@ -694,18 +703,12 @@
           <a:p>
             <a:fld id="{C1FF6DA9-008F-8B48-92A6-B652298478BF}" type="slidenum">
               <a:rPr lang="en-US" smtClean="0"/>
-              <a:t>‹#›</a:t>
             </a:fld>
             <a:endParaRPr lang="en-US"/>
           </a:p>
         </p:txBody>
       </p:sp>
     </p:spTree>
-    <p:extLst>
-      <p:ext uri="{BB962C8B-B14F-4D97-AF65-F5344CB8AC3E}">
-        <p14:creationId xmlns:p14="http://schemas.microsoft.com/office/powerpoint/2010/main" val="3612223792"/>
-      </p:ext>
-    </p:extLst>
   </p:cSld>
   <p:clrMapOvr>
     <a:masterClrMapping/>
@@ -773,6 +776,7 @@
               <a:rPr lang="en-US" smtClean="0"/>
               <a:t>Click to edit Master text styles</a:t>
             </a:r>
+            <a:endParaRPr lang="en-US" smtClean="0"/>
           </a:p>
           <a:p>
             <a:pPr lvl="1"/>
@@ -780,6 +784,7 @@
               <a:rPr lang="en-US" smtClean="0"/>
               <a:t>Second level</a:t>
             </a:r>
+            <a:endParaRPr lang="en-US" smtClean="0"/>
           </a:p>
           <a:p>
             <a:pPr lvl="2"/>
@@ -787,6 +792,7 @@
               <a:rPr lang="en-US" smtClean="0"/>
               <a:t>Third level</a:t>
             </a:r>
+            <a:endParaRPr lang="en-US" smtClean="0"/>
           </a:p>
           <a:p>
             <a:pPr lvl="3"/>
@@ -794,6 +800,7 @@
               <a:rPr lang="en-US" smtClean="0"/>
               <a:t>Fourth level</a:t>
             </a:r>
+            <a:endParaRPr lang="en-US" smtClean="0"/>
           </a:p>
           <a:p>
             <a:pPr lvl="4"/>
@@ -822,7 +829,6 @@
           <a:p>
             <a:fld id="{5BCAD085-E8A6-8845-BD4E-CB4CCA059FC4}" type="datetimeFigureOut">
               <a:rPr lang="en-US" smtClean="0"/>
-              <a:t>1/27/13</a:t>
             </a:fld>
             <a:endParaRPr lang="en-US"/>
           </a:p>
@@ -864,18 +870,12 @@
           <a:p>
             <a:fld id="{C1FF6DA9-008F-8B48-92A6-B652298478BF}" type="slidenum">
               <a:rPr lang="en-US" smtClean="0"/>
-              <a:t>‹#›</a:t>
             </a:fld>
             <a:endParaRPr lang="en-US"/>
           </a:p>
         </p:txBody>
       </p:sp>
     </p:spTree>
-    <p:extLst>
-      <p:ext uri="{BB962C8B-B14F-4D97-AF65-F5344CB8AC3E}">
-        <p14:creationId xmlns:p14="http://schemas.microsoft.com/office/powerpoint/2010/main" val="2614314258"/>
-      </p:ext>
-    </p:extLst>
   </p:cSld>
   <p:clrMapOvr>
     <a:masterClrMapping/>
@@ -1048,6 +1048,7 @@
               <a:rPr lang="en-US" smtClean="0"/>
               <a:t>Click to edit Master text styles</a:t>
             </a:r>
+            <a:endParaRPr lang="en-US" smtClean="0"/>
           </a:p>
         </p:txBody>
       </p:sp>
@@ -1068,7 +1069,6 @@
           <a:p>
             <a:fld id="{5BCAD085-E8A6-8845-BD4E-CB4CCA059FC4}" type="datetimeFigureOut">
               <a:rPr lang="en-US" smtClean="0"/>
-              <a:t>1/27/13</a:t>
             </a:fld>
             <a:endParaRPr lang="en-US"/>
           </a:p>
@@ -1110,18 +1110,12 @@
           <a:p>
             <a:fld id="{C1FF6DA9-008F-8B48-92A6-B652298478BF}" type="slidenum">
               <a:rPr lang="en-US" smtClean="0"/>
-              <a:t>‹#›</a:t>
             </a:fld>
             <a:endParaRPr lang="en-US"/>
           </a:p>
         </p:txBody>
       </p:sp>
     </p:spTree>
-    <p:extLst>
-      <p:ext uri="{BB962C8B-B14F-4D97-AF65-F5344CB8AC3E}">
-        <p14:creationId xmlns:p14="http://schemas.microsoft.com/office/powerpoint/2010/main" val="960648375"/>
-      </p:ext>
-    </p:extLst>
   </p:cSld>
   <p:clrMapOvr>
     <a:masterClrMapping/>
@@ -1222,6 +1216,7 @@
               <a:rPr lang="en-US" smtClean="0"/>
               <a:t>Click to edit Master text styles</a:t>
             </a:r>
+            <a:endParaRPr lang="en-US" smtClean="0"/>
           </a:p>
           <a:p>
             <a:pPr lvl="1"/>
@@ -1229,6 +1224,7 @@
               <a:rPr lang="en-US" smtClean="0"/>
               <a:t>Second level</a:t>
             </a:r>
+            <a:endParaRPr lang="en-US" smtClean="0"/>
           </a:p>
           <a:p>
             <a:pPr lvl="2"/>
@@ -1236,6 +1232,7 @@
               <a:rPr lang="en-US" smtClean="0"/>
               <a:t>Third level</a:t>
             </a:r>
+            <a:endParaRPr lang="en-US" smtClean="0"/>
           </a:p>
           <a:p>
             <a:pPr lvl="3"/>
@@ -1243,6 +1240,7 @@
               <a:rPr lang="en-US" smtClean="0"/>
               <a:t>Fourth level</a:t>
             </a:r>
+            <a:endParaRPr lang="en-US" smtClean="0"/>
           </a:p>
           <a:p>
             <a:pPr lvl="4"/>
@@ -1307,6 +1305,7 @@
               <a:rPr lang="en-US" smtClean="0"/>
               <a:t>Click to edit Master text styles</a:t>
             </a:r>
+            <a:endParaRPr lang="en-US" smtClean="0"/>
           </a:p>
           <a:p>
             <a:pPr lvl="1"/>
@@ -1314,6 +1313,7 @@
               <a:rPr lang="en-US" smtClean="0"/>
               <a:t>Second level</a:t>
             </a:r>
+            <a:endParaRPr lang="en-US" smtClean="0"/>
           </a:p>
           <a:p>
             <a:pPr lvl="2"/>
@@ -1321,6 +1321,7 @@
               <a:rPr lang="en-US" smtClean="0"/>
               <a:t>Third level</a:t>
             </a:r>
+            <a:endParaRPr lang="en-US" smtClean="0"/>
           </a:p>
           <a:p>
             <a:pPr lvl="3"/>
@@ -1328,6 +1329,7 @@
               <a:rPr lang="en-US" smtClean="0"/>
               <a:t>Fourth level</a:t>
             </a:r>
+            <a:endParaRPr lang="en-US" smtClean="0"/>
           </a:p>
           <a:p>
             <a:pPr lvl="4"/>
@@ -1356,7 +1358,6 @@
           <a:p>
             <a:fld id="{5BCAD085-E8A6-8845-BD4E-CB4CCA059FC4}" type="datetimeFigureOut">
               <a:rPr lang="en-US" smtClean="0"/>
-              <a:t>1/27/13</a:t>
             </a:fld>
             <a:endParaRPr lang="en-US"/>
           </a:p>
@@ -1398,18 +1399,12 @@
           <a:p>
             <a:fld id="{C1FF6DA9-008F-8B48-92A6-B652298478BF}" type="slidenum">
               <a:rPr lang="en-US" smtClean="0"/>
-              <a:t>‹#›</a:t>
             </a:fld>
             <a:endParaRPr lang="en-US"/>
           </a:p>
         </p:txBody>
       </p:sp>
     </p:spTree>
-    <p:extLst>
-      <p:ext uri="{BB962C8B-B14F-4D97-AF65-F5344CB8AC3E}">
-        <p14:creationId xmlns:p14="http://schemas.microsoft.com/office/powerpoint/2010/main" val="2782244947"/>
-      </p:ext>
-    </p:extLst>
   </p:cSld>
   <p:clrMapOvr>
     <a:masterClrMapping/>
@@ -1523,6 +1518,7 @@
               <a:rPr lang="en-US" smtClean="0"/>
               <a:t>Click to edit Master text styles</a:t>
             </a:r>
+            <a:endParaRPr lang="en-US" smtClean="0"/>
           </a:p>
         </p:txBody>
       </p:sp>
@@ -1579,6 +1575,7 @@
               <a:rPr lang="en-US" smtClean="0"/>
               <a:t>Click to edit Master text styles</a:t>
             </a:r>
+            <a:endParaRPr lang="en-US" smtClean="0"/>
           </a:p>
           <a:p>
             <a:pPr lvl="1"/>
@@ -1586,6 +1583,7 @@
               <a:rPr lang="en-US" smtClean="0"/>
               <a:t>Second level</a:t>
             </a:r>
+            <a:endParaRPr lang="en-US" smtClean="0"/>
           </a:p>
           <a:p>
             <a:pPr lvl="2"/>
@@ -1593,6 +1591,7 @@
               <a:rPr lang="en-US" smtClean="0"/>
               <a:t>Third level</a:t>
             </a:r>
+            <a:endParaRPr lang="en-US" smtClean="0"/>
           </a:p>
           <a:p>
             <a:pPr lvl="3"/>
@@ -1600,6 +1599,7 @@
               <a:rPr lang="en-US" smtClean="0"/>
               <a:t>Fourth level</a:t>
             </a:r>
+            <a:endParaRPr lang="en-US" smtClean="0"/>
           </a:p>
           <a:p>
             <a:pPr lvl="4"/>
@@ -1673,6 +1673,7 @@
               <a:rPr lang="en-US" smtClean="0"/>
               <a:t>Click to edit Master text styles</a:t>
             </a:r>
+            <a:endParaRPr lang="en-US" smtClean="0"/>
           </a:p>
         </p:txBody>
       </p:sp>
@@ -1729,6 +1730,7 @@
               <a:rPr lang="en-US" smtClean="0"/>
               <a:t>Click to edit Master text styles</a:t>
             </a:r>
+            <a:endParaRPr lang="en-US" smtClean="0"/>
           </a:p>
           <a:p>
             <a:pPr lvl="1"/>
@@ -1736,6 +1738,7 @@
               <a:rPr lang="en-US" smtClean="0"/>
               <a:t>Second level</a:t>
             </a:r>
+            <a:endParaRPr lang="en-US" smtClean="0"/>
           </a:p>
           <a:p>
             <a:pPr lvl="2"/>
@@ -1743,6 +1746,7 @@
               <a:rPr lang="en-US" smtClean="0"/>
               <a:t>Third level</a:t>
             </a:r>
+            <a:endParaRPr lang="en-US" smtClean="0"/>
           </a:p>
           <a:p>
             <a:pPr lvl="3"/>
@@ -1750,6 +1754,7 @@
               <a:rPr lang="en-US" smtClean="0"/>
               <a:t>Fourth level</a:t>
             </a:r>
+            <a:endParaRPr lang="en-US" smtClean="0"/>
           </a:p>
           <a:p>
             <a:pPr lvl="4"/>
@@ -1778,7 +1783,6 @@
           <a:p>
             <a:fld id="{5BCAD085-E8A6-8845-BD4E-CB4CCA059FC4}" type="datetimeFigureOut">
               <a:rPr lang="en-US" smtClean="0"/>
-              <a:t>1/27/13</a:t>
             </a:fld>
             <a:endParaRPr lang="en-US"/>
           </a:p>
@@ -1820,18 +1824,12 @@
           <a:p>
             <a:fld id="{C1FF6DA9-008F-8B48-92A6-B652298478BF}" type="slidenum">
               <a:rPr lang="en-US" smtClean="0"/>
-              <a:t>‹#›</a:t>
             </a:fld>
             <a:endParaRPr lang="en-US"/>
           </a:p>
         </p:txBody>
       </p:sp>
     </p:spTree>
-    <p:extLst>
-      <p:ext uri="{BB962C8B-B14F-4D97-AF65-F5344CB8AC3E}">
-        <p14:creationId xmlns:p14="http://schemas.microsoft.com/office/powerpoint/2010/main" val="990158736"/>
-      </p:ext>
-    </p:extLst>
   </p:cSld>
   <p:clrMapOvr>
     <a:masterClrMapping/>
@@ -1896,7 +1894,6 @@
           <a:p>
             <a:fld id="{5BCAD085-E8A6-8845-BD4E-CB4CCA059FC4}" type="datetimeFigureOut">
               <a:rPr lang="en-US" smtClean="0"/>
-              <a:t>1/27/13</a:t>
             </a:fld>
             <a:endParaRPr lang="en-US"/>
           </a:p>
@@ -1938,18 +1935,12 @@
           <a:p>
             <a:fld id="{C1FF6DA9-008F-8B48-92A6-B652298478BF}" type="slidenum">
               <a:rPr lang="en-US" smtClean="0"/>
-              <a:t>‹#›</a:t>
             </a:fld>
             <a:endParaRPr lang="en-US"/>
           </a:p>
         </p:txBody>
       </p:sp>
     </p:spTree>
-    <p:extLst>
-      <p:ext uri="{BB962C8B-B14F-4D97-AF65-F5344CB8AC3E}">
-        <p14:creationId xmlns:p14="http://schemas.microsoft.com/office/powerpoint/2010/main" val="727027711"/>
-      </p:ext>
-    </p:extLst>
   </p:cSld>
   <p:clrMapOvr>
     <a:masterClrMapping/>
@@ -1991,7 +1982,6 @@
           <a:p>
             <a:fld id="{5BCAD085-E8A6-8845-BD4E-CB4CCA059FC4}" type="datetimeFigureOut">
               <a:rPr lang="en-US" smtClean="0"/>
-              <a:t>1/27/13</a:t>
             </a:fld>
             <a:endParaRPr lang="en-US"/>
           </a:p>
@@ -2033,18 +2023,12 @@
           <a:p>
             <a:fld id="{C1FF6DA9-008F-8B48-92A6-B652298478BF}" type="slidenum">
               <a:rPr lang="en-US" smtClean="0"/>
-              <a:t>‹#›</a:t>
             </a:fld>
             <a:endParaRPr lang="en-US"/>
           </a:p>
         </p:txBody>
       </p:sp>
     </p:spTree>
-    <p:extLst>
-      <p:ext uri="{BB962C8B-B14F-4D97-AF65-F5344CB8AC3E}">
-        <p14:creationId xmlns:p14="http://schemas.microsoft.com/office/powerpoint/2010/main" val="1212999818"/>
-      </p:ext>
-    </p:extLst>
   </p:cSld>
   <p:clrMapOvr>
     <a:masterClrMapping/>
@@ -2154,6 +2138,7 @@
               <a:rPr lang="en-US" smtClean="0"/>
               <a:t>Click to edit Master text styles</a:t>
             </a:r>
+            <a:endParaRPr lang="en-US" smtClean="0"/>
           </a:p>
           <a:p>
             <a:pPr lvl="1"/>
@@ -2161,6 +2146,7 @@
               <a:rPr lang="en-US" smtClean="0"/>
               <a:t>Second level</a:t>
             </a:r>
+            <a:endParaRPr lang="en-US" smtClean="0"/>
           </a:p>
           <a:p>
             <a:pPr lvl="2"/>
@@ -2168,6 +2154,7 @@
               <a:rPr lang="en-US" smtClean="0"/>
               <a:t>Third level</a:t>
             </a:r>
+            <a:endParaRPr lang="en-US" smtClean="0"/>
           </a:p>
           <a:p>
             <a:pPr lvl="3"/>
@@ -2175,6 +2162,7 @@
               <a:rPr lang="en-US" smtClean="0"/>
               <a:t>Fourth level</a:t>
             </a:r>
+            <a:endParaRPr lang="en-US" smtClean="0"/>
           </a:p>
           <a:p>
             <a:pPr lvl="4"/>
@@ -2248,6 +2236,7 @@
               <a:rPr lang="en-US" smtClean="0"/>
               <a:t>Click to edit Master text styles</a:t>
             </a:r>
+            <a:endParaRPr lang="en-US" smtClean="0"/>
           </a:p>
         </p:txBody>
       </p:sp>
@@ -2268,7 +2257,6 @@
           <a:p>
             <a:fld id="{5BCAD085-E8A6-8845-BD4E-CB4CCA059FC4}" type="datetimeFigureOut">
               <a:rPr lang="en-US" smtClean="0"/>
-              <a:t>1/27/13</a:t>
             </a:fld>
             <a:endParaRPr lang="en-US"/>
           </a:p>
@@ -2310,18 +2298,12 @@
           <a:p>
             <a:fld id="{C1FF6DA9-008F-8B48-92A6-B652298478BF}" type="slidenum">
               <a:rPr lang="en-US" smtClean="0"/>
-              <a:t>‹#›</a:t>
             </a:fld>
             <a:endParaRPr lang="en-US"/>
           </a:p>
         </p:txBody>
       </p:sp>
     </p:spTree>
-    <p:extLst>
-      <p:ext uri="{BB962C8B-B14F-4D97-AF65-F5344CB8AC3E}">
-        <p14:creationId xmlns:p14="http://schemas.microsoft.com/office/powerpoint/2010/main" val="1840726560"/>
-      </p:ext>
-    </p:extLst>
   </p:cSld>
   <p:clrMapOvr>
     <a:masterClrMapping/>
@@ -2501,6 +2483,7 @@
               <a:rPr lang="en-US" smtClean="0"/>
               <a:t>Click to edit Master text styles</a:t>
             </a:r>
+            <a:endParaRPr lang="en-US" smtClean="0"/>
           </a:p>
         </p:txBody>
       </p:sp>
@@ -2521,7 +2504,6 @@
           <a:p>
             <a:fld id="{5BCAD085-E8A6-8845-BD4E-CB4CCA059FC4}" type="datetimeFigureOut">
               <a:rPr lang="en-US" smtClean="0"/>
-              <a:t>1/27/13</a:t>
             </a:fld>
             <a:endParaRPr lang="en-US"/>
           </a:p>
@@ -2563,18 +2545,12 @@
           <a:p>
             <a:fld id="{C1FF6DA9-008F-8B48-92A6-B652298478BF}" type="slidenum">
               <a:rPr lang="en-US" smtClean="0"/>
-              <a:t>‹#›</a:t>
             </a:fld>
             <a:endParaRPr lang="en-US"/>
           </a:p>
         </p:txBody>
       </p:sp>
     </p:spTree>
-    <p:extLst>
-      <p:ext uri="{BB962C8B-B14F-4D97-AF65-F5344CB8AC3E}">
-        <p14:creationId xmlns:p14="http://schemas.microsoft.com/office/powerpoint/2010/main" val="3889236939"/>
-      </p:ext>
-    </p:extLst>
   </p:cSld>
   <p:clrMapOvr>
     <a:masterClrMapping/>
@@ -2667,6 +2643,7 @@
               <a:rPr lang="en-US" smtClean="0"/>
               <a:t>Click to edit Master text styles</a:t>
             </a:r>
+            <a:endParaRPr lang="en-US" smtClean="0"/>
           </a:p>
           <a:p>
             <a:pPr lvl="1"/>
@@ -2674,6 +2651,7 @@
               <a:rPr lang="en-US" smtClean="0"/>
               <a:t>Second level</a:t>
             </a:r>
+            <a:endParaRPr lang="en-US" smtClean="0"/>
           </a:p>
           <a:p>
             <a:pPr lvl="2"/>
@@ -2681,6 +2659,7 @@
               <a:rPr lang="en-US" smtClean="0"/>
               <a:t>Third level</a:t>
             </a:r>
+            <a:endParaRPr lang="en-US" smtClean="0"/>
           </a:p>
           <a:p>
             <a:pPr lvl="3"/>
@@ -2688,6 +2667,7 @@
               <a:rPr lang="en-US" smtClean="0"/>
               <a:t>Fourth level</a:t>
             </a:r>
+            <a:endParaRPr lang="en-US" smtClean="0"/>
           </a:p>
           <a:p>
             <a:pPr lvl="4"/>
@@ -2734,7 +2714,6 @@
           <a:p>
             <a:fld id="{5BCAD085-E8A6-8845-BD4E-CB4CCA059FC4}" type="datetimeFigureOut">
               <a:rPr lang="en-US" smtClean="0"/>
-              <a:t>1/27/13</a:t>
             </a:fld>
             <a:endParaRPr lang="en-US"/>
           </a:p>
@@ -2812,18 +2791,12 @@
           <a:p>
             <a:fld id="{C1FF6DA9-008F-8B48-92A6-B652298478BF}" type="slidenum">
               <a:rPr lang="en-US" smtClean="0"/>
-              <a:t>‹#›</a:t>
             </a:fld>
             <a:endParaRPr lang="en-US"/>
           </a:p>
         </p:txBody>
       </p:sp>
     </p:spTree>
-    <p:extLst>
-      <p:ext uri="{BB962C8B-B14F-4D97-AF65-F5344CB8AC3E}">
-        <p14:creationId xmlns:p14="http://schemas.microsoft.com/office/powerpoint/2010/main" val="2209977519"/>
-      </p:ext>
-    </p:extLst>
   </p:cSld>
   <p:clrMap bg1="lt1" tx1="dk1" bg2="lt2" tx2="dk2" accent1="accent1" accent2="accent2" accent3="accent3" accent4="accent4" accent5="accent5" accent6="accent6" hlink="hlink" folHlink="folHlink"/>
   <p:sldLayoutIdLst>
@@ -2861,7 +2834,7 @@
         <a:spcBef>
           <a:spcPct val="20000"/>
         </a:spcBef>
-        <a:buFont typeface="Arial"/>
+        <a:buFont typeface="Arial" panose="020B0604020202020204"/>
         <a:buChar char="•"/>
         <a:defRPr sz="3200" kern="1200">
           <a:solidFill>
@@ -2876,7 +2849,7 @@
         <a:spcBef>
           <a:spcPct val="20000"/>
         </a:spcBef>
-        <a:buFont typeface="Arial"/>
+        <a:buFont typeface="Arial" panose="020B0604020202020204"/>
         <a:buChar char="–"/>
         <a:defRPr sz="2800" kern="1200">
           <a:solidFill>
@@ -2891,7 +2864,7 @@
         <a:spcBef>
           <a:spcPct val="20000"/>
         </a:spcBef>
-        <a:buFont typeface="Arial"/>
+        <a:buFont typeface="Arial" panose="020B0604020202020204"/>
         <a:buChar char="•"/>
         <a:defRPr sz="2400" kern="1200">
           <a:solidFill>
@@ -2906,7 +2879,7 @@
         <a:spcBef>
           <a:spcPct val="20000"/>
         </a:spcBef>
-        <a:buFont typeface="Arial"/>
+        <a:buFont typeface="Arial" panose="020B0604020202020204"/>
         <a:buChar char="–"/>
         <a:defRPr sz="2000" kern="1200">
           <a:solidFill>
@@ -2921,7 +2894,7 @@
         <a:spcBef>
           <a:spcPct val="20000"/>
         </a:spcBef>
-        <a:buFont typeface="Arial"/>
+        <a:buFont typeface="Arial" panose="020B0604020202020204"/>
         <a:buChar char="»"/>
         <a:defRPr sz="2000" kern="1200">
           <a:solidFill>
@@ -2936,7 +2909,7 @@
         <a:spcBef>
           <a:spcPct val="20000"/>
         </a:spcBef>
-        <a:buFont typeface="Arial"/>
+        <a:buFont typeface="Arial" panose="020B0604020202020204"/>
         <a:buChar char="•"/>
         <a:defRPr sz="2000" kern="1200">
           <a:solidFill>
@@ -2951,7 +2924,7 @@
         <a:spcBef>
           <a:spcPct val="20000"/>
         </a:spcBef>
-        <a:buFont typeface="Arial"/>
+        <a:buFont typeface="Arial" panose="020B0604020202020204"/>
         <a:buChar char="•"/>
         <a:defRPr sz="2000" kern="1200">
           <a:solidFill>
@@ -2966,7 +2939,7 @@
         <a:spcBef>
           <a:spcPct val="20000"/>
         </a:spcBef>
-        <a:buFont typeface="Arial"/>
+        <a:buFont typeface="Arial" panose="020B0604020202020204"/>
         <a:buChar char="•"/>
         <a:defRPr sz="2000" kern="1200">
           <a:solidFill>
@@ -2981,7 +2954,7 @@
         <a:spcBef>
           <a:spcPct val="20000"/>
         </a:spcBef>
-        <a:buFont typeface="Arial"/>
+        <a:buFont typeface="Arial" panose="020B0604020202020204"/>
         <a:buChar char="•"/>
         <a:defRPr sz="2000" kern="1200">
           <a:solidFill>
@@ -3093,7 +3066,7 @@
 </file>
 
 <file path=ppt/slides/slide1.xml><?xml version="1.0" encoding="utf-8"?>
-<p:sld xmlns:a="http://schemas.openxmlformats.org/drawingml/2006/main" xmlns:p="http://schemas.openxmlformats.org/presentationml/2006/main" xmlns:r="http://schemas.openxmlformats.org/officeDocument/2006/relationships">
+<p:sld xmlns:a="http://schemas.openxmlformats.org/drawingml/2006/main" xmlns:r="http://schemas.openxmlformats.org/officeDocument/2006/relationships" xmlns:p="http://schemas.openxmlformats.org/presentationml/2006/main">
   <p:cSld>
     <p:bg>
       <p:bgPr>
@@ -3232,7 +3205,7 @@
         <p:spPr>
           <a:xfrm>
             <a:off x="914400" y="3657600"/>
-            <a:ext cx="10332720" cy="457200"/>
+            <a:ext cx="10332720" cy="368300"/>
           </a:xfrm>
           <a:prstGeom prst="rect">
             <a:avLst/>
@@ -3253,43 +3226,13 @@
               </a:defRPr>
             </a:pPr>
             <a:r>
-              <a:t>汇报人：qlbl6666</a:t>
-            </a:r>
-          </a:p>
-        </p:txBody>
-      </p:sp>
-      <p:sp>
-        <p:nvSpPr>
-          <p:cNvPr id="6" name="TextBox 5"/>
-          <p:cNvSpPr txBox="1"/>
-          <p:nvPr/>
-        </p:nvSpPr>
-        <p:spPr>
-          <a:xfrm>
-            <a:off x="914400" y="4206240"/>
-            <a:ext cx="10332720" cy="457200"/>
-          </a:xfrm>
-          <a:prstGeom prst="rect">
-            <a:avLst/>
-          </a:prstGeom>
-          <a:noFill/>
-        </p:spPr>
-        <p:txBody>
-          <a:bodyPr wrap="square">
-            <a:spAutoFit/>
-          </a:bodyPr>
-          <a:lstStyle/>
-          <a:p>
-            <a:pPr algn="ctr">
-              <a:defRPr sz="1600" b="0">
-                <a:solidFill>
-                  <a:srgbClr val="AAAAAA"/>
-                </a:solidFill>
-              </a:defRPr>
-            </a:pPr>
-            <a:r>
-              <a:t>指导教师：课程设计指导组</a:t>
-            </a:r>
+              <a:t>汇报人：</a:t>
+            </a:r>
+            <a:r>
+              <a:rPr lang="zh-CN"/>
+              <a:t>王海阔</a:t>
+            </a:r>
+            <a:endParaRPr lang="zh-CN"/>
           </a:p>
         </p:txBody>
       </p:sp>
@@ -3337,7 +3280,7 @@
 </file>
 
 <file path=ppt/slides/slide10.xml><?xml version="1.0" encoding="utf-8"?>
-<p:sld xmlns:a="http://schemas.openxmlformats.org/drawingml/2006/main" xmlns:p="http://schemas.openxmlformats.org/presentationml/2006/main" xmlns:r="http://schemas.openxmlformats.org/officeDocument/2006/relationships">
+<p:sld xmlns:a="http://schemas.openxmlformats.org/drawingml/2006/main" xmlns:r="http://schemas.openxmlformats.org/officeDocument/2006/relationships" xmlns:p="http://schemas.openxmlformats.org/presentationml/2006/main">
   <p:cSld>
     <p:bg>
       <p:bgPr>
@@ -3887,7 +3830,7 @@
 </file>
 
 <file path=ppt/slides/slide11.xml><?xml version="1.0" encoding="utf-8"?>
-<p:sld xmlns:a="http://schemas.openxmlformats.org/drawingml/2006/main" xmlns:p="http://schemas.openxmlformats.org/presentationml/2006/main" xmlns:r="http://schemas.openxmlformats.org/officeDocument/2006/relationships">
+<p:sld xmlns:a="http://schemas.openxmlformats.org/drawingml/2006/main" xmlns:r="http://schemas.openxmlformats.org/officeDocument/2006/relationships" xmlns:p="http://schemas.openxmlformats.org/presentationml/2006/main">
   <p:cSld>
     <p:bg>
       <p:bgPr>
@@ -5234,7 +5177,7 @@
 </file>
 
 <file path=ppt/slides/slide12.xml><?xml version="1.0" encoding="utf-8"?>
-<p:sld xmlns:a="http://schemas.openxmlformats.org/drawingml/2006/main" xmlns:p="http://schemas.openxmlformats.org/presentationml/2006/main" xmlns:r="http://schemas.openxmlformats.org/officeDocument/2006/relationships">
+<p:sld xmlns:a="http://schemas.openxmlformats.org/drawingml/2006/main" xmlns:r="http://schemas.openxmlformats.org/officeDocument/2006/relationships" xmlns:p="http://schemas.openxmlformats.org/presentationml/2006/main">
   <p:cSld>
     <p:bg>
       <p:bgPr>
@@ -5768,7 +5711,7 @@
 </file>
 
 <file path=ppt/slides/slide13.xml><?xml version="1.0" encoding="utf-8"?>
-<p:sld xmlns:a="http://schemas.openxmlformats.org/drawingml/2006/main" xmlns:p="http://schemas.openxmlformats.org/presentationml/2006/main" xmlns:r="http://schemas.openxmlformats.org/officeDocument/2006/relationships">
+<p:sld xmlns:a="http://schemas.openxmlformats.org/drawingml/2006/main" xmlns:r="http://schemas.openxmlformats.org/officeDocument/2006/relationships" xmlns:p="http://schemas.openxmlformats.org/presentationml/2006/main">
   <p:cSld>
     <p:bg>
       <p:bgPr>
@@ -6741,7 +6684,7 @@
 </file>
 
 <file path=ppt/slides/slide14.xml><?xml version="1.0" encoding="utf-8"?>
-<p:sld xmlns:a="http://schemas.openxmlformats.org/drawingml/2006/main" xmlns:p="http://schemas.openxmlformats.org/presentationml/2006/main" xmlns:r="http://schemas.openxmlformats.org/officeDocument/2006/relationships">
+<p:sld xmlns:a="http://schemas.openxmlformats.org/drawingml/2006/main" xmlns:r="http://schemas.openxmlformats.org/officeDocument/2006/relationships" xmlns:p="http://schemas.openxmlformats.org/presentationml/2006/main">
   <p:cSld>
     <p:bg>
       <p:bgPr>
@@ -7340,7 +7283,7 @@
 </file>
 
 <file path=ppt/slides/slide15.xml><?xml version="1.0" encoding="utf-8"?>
-<p:sld xmlns:a="http://schemas.openxmlformats.org/drawingml/2006/main" xmlns:p="http://schemas.openxmlformats.org/presentationml/2006/main" xmlns:r="http://schemas.openxmlformats.org/officeDocument/2006/relationships">
+<p:sld xmlns:a="http://schemas.openxmlformats.org/drawingml/2006/main" xmlns:r="http://schemas.openxmlformats.org/officeDocument/2006/relationships" xmlns:p="http://schemas.openxmlformats.org/presentationml/2006/main">
   <p:cSld>
     <p:bg>
       <p:bgPr>
@@ -7514,7 +7457,7 @@
 </file>
 
 <file path=ppt/slides/slide2.xml><?xml version="1.0" encoding="utf-8"?>
-<p:sld xmlns:a="http://schemas.openxmlformats.org/drawingml/2006/main" xmlns:p="http://schemas.openxmlformats.org/presentationml/2006/main" xmlns:r="http://schemas.openxmlformats.org/officeDocument/2006/relationships">
+<p:sld xmlns:a="http://schemas.openxmlformats.org/drawingml/2006/main" xmlns:r="http://schemas.openxmlformats.org/officeDocument/2006/relationships" xmlns:p="http://schemas.openxmlformats.org/presentationml/2006/main">
   <p:cSld>
     <p:bg>
       <p:bgPr>
@@ -8256,7 +8199,7 @@
 </file>
 
 <file path=ppt/slides/slide3.xml><?xml version="1.0" encoding="utf-8"?>
-<p:sld xmlns:a="http://schemas.openxmlformats.org/drawingml/2006/main" xmlns:p="http://schemas.openxmlformats.org/presentationml/2006/main" xmlns:r="http://schemas.openxmlformats.org/officeDocument/2006/relationships">
+<p:sld xmlns:a="http://schemas.openxmlformats.org/drawingml/2006/main" xmlns:r="http://schemas.openxmlformats.org/officeDocument/2006/relationships" xmlns:p="http://schemas.openxmlformats.org/presentationml/2006/main">
   <p:cSld>
     <p:bg>
       <p:bgPr>
@@ -8752,7 +8695,7 @@
 </file>
 
 <file path=ppt/slides/slide4.xml><?xml version="1.0" encoding="utf-8"?>
-<p:sld xmlns:a="http://schemas.openxmlformats.org/drawingml/2006/main" xmlns:p="http://schemas.openxmlformats.org/presentationml/2006/main" xmlns:r="http://schemas.openxmlformats.org/officeDocument/2006/relationships">
+<p:sld xmlns:a="http://schemas.openxmlformats.org/drawingml/2006/main" xmlns:r="http://schemas.openxmlformats.org/officeDocument/2006/relationships" xmlns:p="http://schemas.openxmlformats.org/presentationml/2006/main">
   <p:cSld>
     <p:bg>
       <p:bgPr>
@@ -9644,7 +9587,7 @@
 </file>
 
 <file path=ppt/slides/slide5.xml><?xml version="1.0" encoding="utf-8"?>
-<p:sld xmlns:a="http://schemas.openxmlformats.org/drawingml/2006/main" xmlns:p="http://schemas.openxmlformats.org/presentationml/2006/main" xmlns:r="http://schemas.openxmlformats.org/officeDocument/2006/relationships">
+<p:sld xmlns:a="http://schemas.openxmlformats.org/drawingml/2006/main" xmlns:r="http://schemas.openxmlformats.org/officeDocument/2006/relationships" xmlns:p="http://schemas.openxmlformats.org/presentationml/2006/main">
   <p:cSld>
     <p:bg>
       <p:bgPr>
@@ -10418,7 +10361,7 @@
 </file>
 
 <file path=ppt/slides/slide6.xml><?xml version="1.0" encoding="utf-8"?>
-<p:sld xmlns:a="http://schemas.openxmlformats.org/drawingml/2006/main" xmlns:p="http://schemas.openxmlformats.org/presentationml/2006/main" xmlns:r="http://schemas.openxmlformats.org/officeDocument/2006/relationships">
+<p:sld xmlns:a="http://schemas.openxmlformats.org/drawingml/2006/main" xmlns:r="http://schemas.openxmlformats.org/officeDocument/2006/relationships" xmlns:p="http://schemas.openxmlformats.org/presentationml/2006/main">
   <p:cSld>
     <p:bg>
       <p:bgPr>
@@ -11119,7 +11062,7 @@
 </file>
 
 <file path=ppt/slides/slide7.xml><?xml version="1.0" encoding="utf-8"?>
-<p:sld xmlns:a="http://schemas.openxmlformats.org/drawingml/2006/main" xmlns:p="http://schemas.openxmlformats.org/presentationml/2006/main" xmlns:r="http://schemas.openxmlformats.org/officeDocument/2006/relationships">
+<p:sld xmlns:a="http://schemas.openxmlformats.org/drawingml/2006/main" xmlns:r="http://schemas.openxmlformats.org/officeDocument/2006/relationships" xmlns:p="http://schemas.openxmlformats.org/presentationml/2006/main">
   <p:cSld>
     <p:bg>
       <p:bgPr>
@@ -12487,7 +12430,7 @@
 </file>
 
 <file path=ppt/slides/slide8.xml><?xml version="1.0" encoding="utf-8"?>
-<p:sld xmlns:a="http://schemas.openxmlformats.org/drawingml/2006/main" xmlns:p="http://schemas.openxmlformats.org/presentationml/2006/main" xmlns:r="http://schemas.openxmlformats.org/officeDocument/2006/relationships">
+<p:sld xmlns:a="http://schemas.openxmlformats.org/drawingml/2006/main" xmlns:r="http://schemas.openxmlformats.org/officeDocument/2006/relationships" xmlns:p="http://schemas.openxmlformats.org/presentationml/2006/main">
   <p:cSld>
     <p:bg>
       <p:bgPr>
@@ -13793,7 +13736,7 @@
 </file>
 
 <file path=ppt/slides/slide9.xml><?xml version="1.0" encoding="utf-8"?>
-<p:sld xmlns:a="http://schemas.openxmlformats.org/drawingml/2006/main" xmlns:p="http://schemas.openxmlformats.org/presentationml/2006/main" xmlns:r="http://schemas.openxmlformats.org/officeDocument/2006/relationships">
+<p:sld xmlns:a="http://schemas.openxmlformats.org/drawingml/2006/main" xmlns:r="http://schemas.openxmlformats.org/officeDocument/2006/relationships" xmlns:p="http://schemas.openxmlformats.org/presentationml/2006/main">
   <p:cSld>
     <p:bg>
       <p:bgPr>
@@ -15153,6 +15096,10 @@
       </a:style>
     </a:lnDef>
   </a:objectDefaults>
-  <a:extraClrSchemeLst/>
+  <a:extLst>
+    <a:ext uri="{05A4C25C-085E-4340-85A3-A5531E510DB2}">
+      <thm15:themeFamily xmlns:thm15="http://schemas.microsoft.com/office/thememl/2012/main" name="Office Theme" id="{62F939B6-93AF-4DB8-9C6B-D6C7DFDC589F}" vid="{4A3C46E8-61CC-4603-A589-7422A47A8E4A}"/>
+    </a:ext>
+  </a:extLst>
 </a:theme>
 </file>
--- a/docs/答辩PPT.pptx
+++ b/docs/答辩PPT.pptx
@@ -5992,7 +5992,7 @@
               </a:defRPr>
             </a:pPr>
             <a:r>
-              <a:t>Git完整提交历史，按阶段小步提交，共7次有意义提交</a:t>
+              <a:t>Git完整提交历史，按阶段小步提交，共11次有意义提交</a:t>
             </a:r>
           </a:p>
         </p:txBody>
@@ -6925,7 +6925,7 @@
               </a:defRPr>
             </a:pPr>
             <a:r>
-              <a:t>● 完整B/S架构系统（前端6页面+后端5模块+算法4子模块）</a:t>
+              <a:t>● 完整B/S + C/S双架构系统（前端6页面+后端5模块+算法4子模块）</a:t>
             </a:r>
           </a:p>
           <a:p>
@@ -11053,6 +11053,88 @@
           </a:p>
         </p:txBody>
       </p:sp>
+      <p:sp>
+        <p:nvSpPr>
+          <p:cNvPr id="19" name="TextBox 18"/>
+          <p:cNvSpPr txBox="1"/>
+          <p:nvPr/>
+        </p:nvSpPr>
+        <p:spPr>
+          <a:xfrm>
+            <a:off x="4754880" y="2560320"/>
+            <a:ext cx="4114800" cy="365760"/>
+          </a:xfrm>
+          <a:prstGeom prst="rect">
+            <a:avLst/>
+          </a:prstGeom>
+          <a:noFill/>
+        </p:spPr>
+        <p:txBody>
+          <a:bodyPr wrap="square">
+            <a:spAutoFit/>
+          </a:bodyPr>
+          <a:lstStyle/>
+          <a:p>
+            <a:pPr algn="l">
+              <a:defRPr sz="1600" b="1">
+                <a:solidFill>
+                  <a:srgbClr val="FF6B35"/>
+                </a:solidFill>
+              </a:defRPr>
+            </a:pPr>
+            <a:r>
+              <a:t>C/S 桌面客户端（新增）</a:t>
+            </a:r>
+          </a:p>
+        </p:txBody>
+      </p:sp>
+      <p:sp>
+        <p:nvSpPr>
+          <p:cNvPr id="20" name="TextBox 19"/>
+          <p:cNvSpPr txBox="1"/>
+          <p:nvPr/>
+        </p:nvSpPr>
+        <p:spPr>
+          <a:xfrm>
+            <a:off x="4754880" y="3017520"/>
+            <a:ext cx="4114800" cy="1371600"/>
+          </a:xfrm>
+          <a:prstGeom prst="rect">
+            <a:avLst/>
+          </a:prstGeom>
+          <a:noFill/>
+        </p:spPr>
+        <p:txBody>
+          <a:bodyPr wrap="square">
+            <a:spAutoFit/>
+          </a:bodyPr>
+          <a:lstStyle/>
+          <a:p>
+            <a:pPr algn="l">
+              <a:defRPr sz="1200" b="0">
+                <a:solidFill>
+                  <a:srgbClr val="666666"/>
+                </a:solidFill>
+              </a:defRPr>
+            </a:pPr>
+            <a:r>
+              <a:t>• Python Tkinter 桌面应用</a:t>
+            </a:r>
+            <a:br/>
+            <a:r>
+              <a:t>• 登录 / 缺陷检测 / 历史记录 / 统计仪表盘</a:t>
+            </a:r>
+            <a:br/>
+            <a:r>
+              <a:t>• 调用同一套后端 RESTful API</a:t>
+            </a:r>
+            <a:br/>
+            <a:r>
+              <a:t>• 适合产线单机操作场景</a:t>
+            </a:r>
+          </a:p>
+        </p:txBody>
+      </p:sp>
     </p:spTree>
   </p:cSld>
   <p:clrMapOvr>
@@ -14768,6 +14850,84 @@
             </a:pPr>
             <a:r>
               <a:t>技术：原生HTML+CSS+JS，Bootstrap 5 UI组件，ECharts数据可视化，Axios HTTP请求</a:t>
+            </a:r>
+          </a:p>
+        </p:txBody>
+      </p:sp>
+      <p:sp>
+        <p:nvSpPr>
+          <p:cNvPr id="27" name="TextBox 26"/>
+          <p:cNvSpPr txBox="1"/>
+          <p:nvPr/>
+        </p:nvSpPr>
+        <p:spPr>
+          <a:xfrm>
+            <a:off x="457200" y="4114800"/>
+            <a:ext cx="8229600" cy="365760"/>
+          </a:xfrm>
+          <a:prstGeom prst="rect">
+            <a:avLst/>
+          </a:prstGeom>
+          <a:noFill/>
+        </p:spPr>
+        <p:txBody>
+          <a:bodyPr wrap="square">
+            <a:spAutoFit/>
+          </a:bodyPr>
+          <a:lstStyle/>
+          <a:p>
+            <a:pPr algn="l">
+              <a:defRPr sz="1600" b="1">
+                <a:solidFill>
+                  <a:srgbClr val="FF6B35"/>
+                </a:solidFill>
+              </a:defRPr>
+            </a:pPr>
+            <a:r>
+              <a:t>C/S 桌面客户端实现</a:t>
+            </a:r>
+          </a:p>
+        </p:txBody>
+      </p:sp>
+      <p:sp>
+        <p:nvSpPr>
+          <p:cNvPr id="28" name="TextBox 27"/>
+          <p:cNvSpPr txBox="1"/>
+          <p:nvPr/>
+        </p:nvSpPr>
+        <p:spPr>
+          <a:xfrm>
+            <a:off x="457200" y="4572000"/>
+            <a:ext cx="8229600" cy="1371600"/>
+          </a:xfrm>
+          <a:prstGeom prst="rect">
+            <a:avLst/>
+          </a:prstGeom>
+          <a:noFill/>
+        </p:spPr>
+        <p:txBody>
+          <a:bodyPr wrap="square">
+            <a:spAutoFit/>
+          </a:bodyPr>
+          <a:lstStyle/>
+          <a:p>
+            <a:pPr algn="l">
+              <a:defRPr sz="1200" b="0">
+                <a:solidFill>
+                  <a:srgbClr val="666666"/>
+                </a:solidFill>
+              </a:defRPr>
+            </a:pPr>
+            <a:r>
+              <a:t>• 基于 Tkinter + requests，Python 标准库内置，无需额外安装</a:t>
+            </a:r>
+            <a:br/>
+            <a:r>
+              <a:t>• 三标签页布局：缺陷检测（图片预览+结果文本）、历史记录（Treeview表格）、统计仪表盘（卡片+条形图）</a:t>
+            </a:r>
+            <a:br/>
+            <a:r>
+              <a:t>• 与 B/S 端共享后端服务和数据库，数据实时同步</a:t>
             </a:r>
           </a:p>
         </p:txBody>

--- a/docs/答辩PPT.pptx
+++ b/docs/答辩PPT.pptx
@@ -121,7 +121,7 @@
   <p:extLst>
     <p:ext uri="{EFAFB233-063F-42B5-8137-9DF3F51BA10A}">
       <p15:sldGuideLst xmlns:p15="http://schemas.microsoft.com/office/powerpoint/2012/main">
-        <p15:guide id="1" orient="horz" pos="2160" userDrawn="1">
+        <p15:guide id="1" orient="horz" pos="2188" userDrawn="1">
           <p15:clr>
             <a:srgbClr val="A4A3A4"/>
           </p15:clr>
@@ -10664,7 +10664,7 @@
         <p:spPr>
           <a:xfrm>
             <a:off x="1645920" y="2057400"/>
-            <a:ext cx="8869680" cy="640080"/>
+            <a:ext cx="8869680" cy="491490"/>
           </a:xfrm>
           <a:prstGeom prst="rect">
             <a:avLst/>
@@ -10823,7 +10823,7 @@
         </p:nvSpPr>
         <p:spPr>
           <a:xfrm>
-            <a:off x="1645920" y="3520440"/>
+            <a:off x="460375" y="3474720"/>
             <a:ext cx="8869680" cy="640080"/>
           </a:xfrm>
           <a:prstGeom prst="rect">
@@ -11061,30 +11061,39 @@
         </p:nvSpPr>
         <p:spPr>
           <a:xfrm>
-            <a:off x="4754880" y="2560320"/>
-            <a:ext cx="4114800" cy="365760"/>
-          </a:xfrm>
-          <a:prstGeom prst="rect">
-            <a:avLst/>
-          </a:prstGeom>
-          <a:noFill/>
-        </p:spPr>
-        <p:txBody>
-          <a:bodyPr wrap="square">
-            <a:spAutoFit/>
-          </a:bodyPr>
-          <a:lstStyle/>
-          <a:p>
-            <a:pPr algn="l">
-              <a:defRPr sz="1600" b="1">
-                <a:solidFill>
-                  <a:srgbClr val="FF6B35"/>
-                </a:solidFill>
-              </a:defRPr>
-            </a:pPr>
-            <a:r>
-              <a:t>C/S 桌面客户端（新增）</a:t>
-            </a:r>
+            <a:off x="4178300" y="2451735"/>
+            <a:ext cx="4114800" cy="337185"/>
+          </a:xfrm>
+          <a:prstGeom prst="rect">
+            <a:avLst/>
+          </a:prstGeom>
+          <a:noFill/>
+        </p:spPr>
+        <p:txBody>
+          <a:bodyPr wrap="square">
+            <a:spAutoFit/>
+          </a:bodyPr>
+          <a:lstStyle/>
+          <a:p>
+            <a:pPr lvl="0" algn="ctr">
+              <a:buClrTx/>
+              <a:buSzTx/>
+              <a:buFontTx/>
+              <a:defRPr sz="1300" b="0">
+                <a:solidFill>
+                  <a:srgbClr val="333333"/>
+                </a:solidFill>
+              </a:defRPr>
+            </a:pPr>
+            <a:r>
+              <a:rPr>
+                <a:sym typeface="+mn-ea"/>
+              </a:rPr>
+              <a:t>C/S 桌面客户端</a:t>
+            </a:r>
+            <a:endParaRPr>
+              <a:sym typeface="+mn-ea"/>
+            </a:endParaRPr>
           </a:p>
         </p:txBody>
       </p:sp>
@@ -11096,17 +11105,17 @@
         </p:nvSpPr>
         <p:spPr>
           <a:xfrm>
-            <a:off x="4754880" y="3017520"/>
-            <a:ext cx="4114800" cy="1371600"/>
-          </a:xfrm>
-          <a:prstGeom prst="rect">
-            <a:avLst/>
-          </a:prstGeom>
-          <a:noFill/>
-        </p:spPr>
-        <p:txBody>
-          <a:bodyPr wrap="square">
-            <a:spAutoFit/>
+            <a:off x="6939280" y="3474720"/>
+            <a:ext cx="2979420" cy="1144905"/>
+          </a:xfrm>
+          <a:prstGeom prst="rect">
+            <a:avLst/>
+          </a:prstGeom>
+          <a:noFill/>
+        </p:spPr>
+        <p:txBody>
+          <a:bodyPr wrap="square">
+            <a:noAutofit/>
           </a:bodyPr>
           <a:lstStyle/>
           <a:p>
@@ -14617,16 +14626,16 @@
         <p:spPr>
           <a:xfrm>
             <a:off x="685800" y="4480560"/>
-            <a:ext cx="3200400" cy="1280160"/>
-          </a:xfrm>
-          <a:prstGeom prst="rect">
-            <a:avLst/>
-          </a:prstGeom>
-          <a:noFill/>
-        </p:spPr>
-        <p:txBody>
-          <a:bodyPr wrap="square">
-            <a:spAutoFit/>
+            <a:ext cx="2682240" cy="852170"/>
+          </a:xfrm>
+          <a:prstGeom prst="rect">
+            <a:avLst/>
+          </a:prstGeom>
+          <a:noFill/>
+        </p:spPr>
+        <p:txBody>
+          <a:bodyPr wrap="square">
+            <a:noAutofit/>
           </a:bodyPr>
           <a:lstStyle/>
           <a:p>
@@ -14862,30 +14871,39 @@
         </p:nvSpPr>
         <p:spPr>
           <a:xfrm>
-            <a:off x="457200" y="4114800"/>
-            <a:ext cx="8229600" cy="365760"/>
-          </a:xfrm>
-          <a:prstGeom prst="rect">
-            <a:avLst/>
-          </a:prstGeom>
-          <a:noFill/>
-        </p:spPr>
-        <p:txBody>
-          <a:bodyPr wrap="square">
-            <a:spAutoFit/>
-          </a:bodyPr>
-          <a:lstStyle/>
-          <a:p>
-            <a:pPr algn="l">
-              <a:defRPr sz="1600" b="1">
-                <a:solidFill>
-                  <a:srgbClr val="FF6B35"/>
-                </a:solidFill>
-              </a:defRPr>
-            </a:pPr>
-            <a:r>
+            <a:off x="685800" y="4301490"/>
+            <a:ext cx="8229600" cy="337185"/>
+          </a:xfrm>
+          <a:prstGeom prst="rect">
+            <a:avLst/>
+          </a:prstGeom>
+          <a:noFill/>
+        </p:spPr>
+        <p:txBody>
+          <a:bodyPr wrap="square">
+            <a:spAutoFit/>
+          </a:bodyPr>
+          <a:lstStyle/>
+          <a:p>
+            <a:pPr lvl="0" algn="l">
+              <a:buClrTx/>
+              <a:buSzTx/>
+              <a:buFontTx/>
+              <a:defRPr sz="1300" b="0">
+                <a:solidFill>
+                  <a:srgbClr val="333333"/>
+                </a:solidFill>
+              </a:defRPr>
+            </a:pPr>
+            <a:r>
+              <a:rPr>
+                <a:sym typeface="+mn-ea"/>
+              </a:rPr>
               <a:t>C/S 桌面客户端实现</a:t>
             </a:r>
+            <a:endParaRPr>
+              <a:sym typeface="+mn-ea"/>
+            </a:endParaRPr>
           </a:p>
         </p:txBody>
       </p:sp>
@@ -14897,8 +14915,8 @@
         </p:nvSpPr>
         <p:spPr>
           <a:xfrm>
-            <a:off x="457200" y="4572000"/>
-            <a:ext cx="8229600" cy="1371600"/>
+            <a:off x="457200" y="5290820"/>
+            <a:ext cx="7599045" cy="645160"/>
           </a:xfrm>
           <a:prstGeom prst="rect">
             <a:avLst/>
